--- a/Tool-Vulnerability-Workshop2026.pptx
+++ b/Tool-Vulnerability-Workshop2026.pptx
@@ -8161,23 +8161,7 @@
                   <a:schemeClr val="bg2"/>
                 </a:solidFill>
               </a:rPr>
-              <a:t>Workshop_masc</a:t>
-            </a:r>
-            <a:r>
-              <a:rPr lang="en" b="1" err="1">
-                <a:solidFill>
-                  <a:schemeClr val="bg2"/>
-                </a:solidFill>
-              </a:rPr>
-              <a:t>.</a:t>
-            </a:r>
-            <a:r>
-              <a:rPr lang="en" b="1">
-                <a:solidFill>
-                  <a:schemeClr val="bg2"/>
-                </a:solidFill>
-              </a:rPr>
-              <a:t>zip</a:t>
+              <a:t>Workshop_masc.zip</a:t>
             </a:r>
             <a:endParaRPr b="1" dirty="0">
               <a:solidFill>
